--- a/app/templates/universidad_azul/plantilla_diplomado.pptx
+++ b/app/templates/universidad_azul/plantilla_diplomado.pptx
@@ -209,7 +209,7 @@
           <a:p>
             <a:fld id="{03C7FEFC-EB52-44D6-B3F1-2A7BB7FA4226}" type="datetimeFigureOut">
               <a:rPr lang="es-PE" smtClean="0"/>
-              <a:t>28/01/2026</a:t>
+              <a:t>2/02/2026</a:t>
             </a:fld>
             <a:endParaRPr lang="es-PE" dirty="0"/>
           </a:p>
@@ -374,7 +374,7 @@
           <a:p>
             <a:fld id="{64955E78-CBAA-441B-9163-D9CD5E983BDA}" type="datetimeFigureOut">
               <a:rPr lang="en-US" smtClean="0"/>
-              <a:t>1/28/2026</a:t>
+              <a:t>2/2/2026</a:t>
             </a:fld>
             <a:endParaRPr lang="en-US" dirty="0"/>
           </a:p>
@@ -773,7 +773,7 @@
           <a:p>
             <a:fld id="{5C4C4E00-4716-4B48-9D97-535E4F94A274}" type="datetimeFigureOut">
               <a:rPr lang="es-PE" smtClean="0"/>
-              <a:t>28/01/2026</a:t>
+              <a:t>2/02/2026</a:t>
             </a:fld>
             <a:endParaRPr lang="es-PE" dirty="0"/>
           </a:p>
@@ -943,7 +943,7 @@
           <a:p>
             <a:fld id="{5C4C4E00-4716-4B48-9D97-535E4F94A274}" type="datetimeFigureOut">
               <a:rPr lang="es-PE" smtClean="0"/>
-              <a:t>28/01/2026</a:t>
+              <a:t>2/02/2026</a:t>
             </a:fld>
             <a:endParaRPr lang="es-PE" dirty="0"/>
           </a:p>
@@ -1123,7 +1123,7 @@
           <a:p>
             <a:fld id="{5C4C4E00-4716-4B48-9D97-535E4F94A274}" type="datetimeFigureOut">
               <a:rPr lang="es-PE" smtClean="0"/>
-              <a:t>28/01/2026</a:t>
+              <a:t>2/02/2026</a:t>
             </a:fld>
             <a:endParaRPr lang="es-PE" dirty="0"/>
           </a:p>
@@ -1293,7 +1293,7 @@
           <a:p>
             <a:fld id="{5C4C4E00-4716-4B48-9D97-535E4F94A274}" type="datetimeFigureOut">
               <a:rPr lang="es-PE" smtClean="0"/>
-              <a:t>28/01/2026</a:t>
+              <a:t>2/02/2026</a:t>
             </a:fld>
             <a:endParaRPr lang="es-PE" dirty="0"/>
           </a:p>
@@ -1537,7 +1537,7 @@
           <a:p>
             <a:fld id="{5C4C4E00-4716-4B48-9D97-535E4F94A274}" type="datetimeFigureOut">
               <a:rPr lang="es-PE" smtClean="0"/>
-              <a:t>28/01/2026</a:t>
+              <a:t>2/02/2026</a:t>
             </a:fld>
             <a:endParaRPr lang="es-PE" dirty="0"/>
           </a:p>
@@ -1769,7 +1769,7 @@
           <a:p>
             <a:fld id="{5C4C4E00-4716-4B48-9D97-535E4F94A274}" type="datetimeFigureOut">
               <a:rPr lang="es-PE" smtClean="0"/>
-              <a:t>28/01/2026</a:t>
+              <a:t>2/02/2026</a:t>
             </a:fld>
             <a:endParaRPr lang="es-PE" dirty="0"/>
           </a:p>
@@ -2136,7 +2136,7 @@
           <a:p>
             <a:fld id="{5C4C4E00-4716-4B48-9D97-535E4F94A274}" type="datetimeFigureOut">
               <a:rPr lang="es-PE" smtClean="0"/>
-              <a:t>28/01/2026</a:t>
+              <a:t>2/02/2026</a:t>
             </a:fld>
             <a:endParaRPr lang="es-PE" dirty="0"/>
           </a:p>
@@ -2254,7 +2254,7 @@
           <a:p>
             <a:fld id="{5C4C4E00-4716-4B48-9D97-535E4F94A274}" type="datetimeFigureOut">
               <a:rPr lang="es-PE" smtClean="0"/>
-              <a:t>28/01/2026</a:t>
+              <a:t>2/02/2026</a:t>
             </a:fld>
             <a:endParaRPr lang="es-PE" dirty="0"/>
           </a:p>
@@ -2349,7 +2349,7 @@
           <a:p>
             <a:fld id="{5C4C4E00-4716-4B48-9D97-535E4F94A274}" type="datetimeFigureOut">
               <a:rPr lang="es-PE" smtClean="0"/>
-              <a:t>28/01/2026</a:t>
+              <a:t>2/02/2026</a:t>
             </a:fld>
             <a:endParaRPr lang="es-PE" dirty="0"/>
           </a:p>
@@ -2626,7 +2626,7 @@
           <a:p>
             <a:fld id="{5C4C4E00-4716-4B48-9D97-535E4F94A274}" type="datetimeFigureOut">
               <a:rPr lang="es-PE" smtClean="0"/>
-              <a:t>28/01/2026</a:t>
+              <a:t>2/02/2026</a:t>
             </a:fld>
             <a:endParaRPr lang="es-PE" dirty="0"/>
           </a:p>
@@ -2883,7 +2883,7 @@
           <a:p>
             <a:fld id="{5C4C4E00-4716-4B48-9D97-535E4F94A274}" type="datetimeFigureOut">
               <a:rPr lang="es-PE" smtClean="0"/>
-              <a:t>28/01/2026</a:t>
+              <a:t>2/02/2026</a:t>
             </a:fld>
             <a:endParaRPr lang="es-PE" dirty="0"/>
           </a:p>
@@ -3096,7 +3096,7 @@
           <a:p>
             <a:fld id="{5C4C4E00-4716-4B48-9D97-535E4F94A274}" type="datetimeFigureOut">
               <a:rPr lang="es-PE" smtClean="0"/>
-              <a:t>28/01/2026</a:t>
+              <a:t>2/02/2026</a:t>
             </a:fld>
             <a:endParaRPr lang="es-PE" dirty="0"/>
           </a:p>
@@ -5200,14 +5200,14 @@
           <p:nvPr>
             <p:extLst>
               <p:ext uri="{D42A27DB-BD31-4B8C-83A1-F6EECF244321}">
-                <p14:modId xmlns:p14="http://schemas.microsoft.com/office/powerpoint/2010/main" val="2301448026"/>
+                <p14:modId xmlns:p14="http://schemas.microsoft.com/office/powerpoint/2010/main" val="1728316434"/>
               </p:ext>
             </p:extLst>
           </p:nvPr>
         </p:nvGraphicFramePr>
         <p:xfrm>
           <a:off x="745017" y="3111497"/>
-          <a:ext cx="5367967" cy="4519506"/>
+          <a:ext cx="5367967" cy="4679526"/>
         </p:xfrm>
         <a:graphic>
           <a:graphicData uri="http://schemas.openxmlformats.org/drawingml/2006/table">
@@ -5404,7 +5404,7 @@
                             <a:schemeClr val="tx1"/>
                           </a:solidFill>
                         </a:rPr>
-                        <a:t>{{HORAS_MODULO_1}}</a:t>
+                        <a:t>{{HORAS_MODULO}}</a:t>
                       </a:r>
                     </a:p>
                   </a:txBody>
@@ -5493,7 +5493,7 @@
                       <a:pPr algn="ctr"/>
                       <a:r>
                         <a:rPr lang="en-US" sz="1050" b="0" dirty="0"/>
-                        <a:t>{{HORAS_MODULO_2}}</a:t>
+                        <a:t>{{HORAS_MODULO}}</a:t>
                       </a:r>
                     </a:p>
                   </a:txBody>
@@ -5579,7 +5579,7 @@
                             <a:schemeClr val="tx1"/>
                           </a:solidFill>
                         </a:rPr>
-                        <a:t>{{HORAS_MODULO_3}}</a:t>
+                        <a:t>{{HORAS_MODULO}}</a:t>
                       </a:r>
                     </a:p>
                   </a:txBody>
@@ -5677,7 +5677,7 @@
                       <a:pPr algn="ctr"/>
                       <a:r>
                         <a:rPr lang="en-US" sz="1050" b="0" dirty="0"/>
-                        <a:t>{{HORAS_MODULO_4}}</a:t>
+                        <a:t>{{HORAS_MODULO}}</a:t>
                       </a:r>
                     </a:p>
                   </a:txBody>
@@ -5779,7 +5779,7 @@
                             <a:schemeClr val="tx1"/>
                           </a:solidFill>
                         </a:rPr>
-                        <a:t>{{HORAS_MODULO_5}}</a:t>
+                        <a:t>{{HORAS_MODULO}}</a:t>
                       </a:r>
                     </a:p>
                   </a:txBody>
@@ -5880,7 +5880,7 @@
                       <a:pPr algn="ctr"/>
                       <a:r>
                         <a:rPr lang="en-US" sz="1050" b="0" dirty="0"/>
-                        <a:t>{{HORAS_MODULO_6}}</a:t>
+                        <a:t>{{HORAS_MODULO}}</a:t>
                       </a:r>
                     </a:p>
                   </a:txBody>
@@ -5985,7 +5985,7 @@
                             <a:schemeClr val="tx1"/>
                           </a:solidFill>
                         </a:rPr>
-                        <a:t>{{HORAS_MODULO_7}}</a:t>
+                        <a:t>{{HORAS_MODULO}}</a:t>
                       </a:r>
                     </a:p>
                   </a:txBody>
@@ -6076,10 +6076,9 @@
                     <a:p>
                       <a:pPr algn="ctr"/>
                       <a:r>
-                        <a:rPr lang="en-US" sz="1050" b="0"/>
-                        <a:t>{{HORAS_MODULO_8}}</a:t>
+                        <a:rPr lang="en-US" sz="1050" b="0" dirty="0"/>
+                        <a:t>{{HORAS_MODULO}}</a:t>
                       </a:r>
-                      <a:endParaRPr lang="en-US" sz="1050" b="0" dirty="0"/>
                     </a:p>
                   </a:txBody>
                   <a:tcPr anchor="ctr"/>
@@ -6170,7 +6169,7 @@
                         <a:defRPr/>
                       </a:pPr>
                       <a:r>
-                        <a:rPr lang="es-ES" sz="1050" b="0" kern="1200" dirty="0">
+                        <a:rPr lang="es-ES" sz="1050" b="0" kern="1200">
                           <a:solidFill>
                             <a:schemeClr val="dk1"/>
                           </a:solidFill>
@@ -6178,7 +6177,7 @@
                           <a:ea typeface="+mn-ea"/>
                           <a:cs typeface="+mn-cs"/>
                         </a:rPr>
-                        <a:t>1200</a:t>
+                        <a:t>{{HORAS_ACADEMICAS}}</a:t>
                       </a:r>
                       <a:endParaRPr lang="en-US" sz="1050" b="0" kern="1200" dirty="0">
                         <a:solidFill>

--- a/app/templates/universidad_azul/plantilla_diplomado.pptx
+++ b/app/templates/universidad_azul/plantilla_diplomado.pptx
@@ -122,9 +122,133 @@
 <file path=ppt/revisionInfo.xml><?xml version="1.0" encoding="utf-8"?>
 <p1510:revInfo xmlns:a="http://schemas.openxmlformats.org/drawingml/2006/main" xmlns:r="http://schemas.openxmlformats.org/officeDocument/2006/relationships" xmlns:p1510="http://schemas.microsoft.com/office/powerpoint/2015/10/main">
   <p1510:revLst>
-    <p1510:client id="{9376DF29-1C64-4DEC-9B79-909CC79311CB}" v="50" dt="2026-01-14T21:30:04.395"/>
+    <p1510:client id="{4EA50A64-F2EE-41C9-82F9-A5599628D266}" v="17" dt="2026-02-27T22:18:25.897"/>
   </p1510:revLst>
 </p1510:revInfo>
+</file>
+
+<file path=ppt/changesInfos/changesInfo1.xml><?xml version="1.0" encoding="utf-8"?>
+<pc:chgInfo xmlns:a="http://schemas.openxmlformats.org/drawingml/2006/main" xmlns:r="http://schemas.openxmlformats.org/officeDocument/2006/relationships" xmlns:ac="http://schemas.microsoft.com/office/drawing/2013/main/command" xmlns:pc="http://schemas.microsoft.com/office/powerpoint/2013/main/command">
+  <pc:docChgLst>
+    <pc:chgData name="Benjamín de Jesús Cueva Niño de Guzmán" userId="56da303013910523" providerId="LiveId" clId="{532B7A48-8887-4F62-9537-0BA1FAE83637}"/>
+    <pc:docChg chg="undo custSel modSld">
+      <pc:chgData name="Benjamín de Jesús Cueva Niño de Guzmán" userId="56da303013910523" providerId="LiveId" clId="{532B7A48-8887-4F62-9537-0BA1FAE83637}" dt="2026-02-27T22:28:00.143" v="200" actId="255"/>
+      <pc:docMkLst>
+        <pc:docMk/>
+      </pc:docMkLst>
+      <pc:sldChg chg="addSp delSp modSp mod">
+        <pc:chgData name="Benjamín de Jesús Cueva Niño de Guzmán" userId="56da303013910523" providerId="LiveId" clId="{532B7A48-8887-4F62-9537-0BA1FAE83637}" dt="2026-02-27T20:31:50.405" v="195" actId="1036"/>
+        <pc:sldMkLst>
+          <pc:docMk/>
+          <pc:sldMk cId="1330590418" sldId="271"/>
+        </pc:sldMkLst>
+        <pc:spChg chg="mod">
+          <ac:chgData name="Benjamín de Jesús Cueva Niño de Guzmán" userId="56da303013910523" providerId="LiveId" clId="{532B7A48-8887-4F62-9537-0BA1FAE83637}" dt="2026-02-27T19:56:56.957" v="19" actId="962"/>
+          <ac:spMkLst>
+            <pc:docMk/>
+            <pc:sldMk cId="1330590418" sldId="271"/>
+            <ac:spMk id="2" creationId="{8999ECBF-332A-795D-7E69-2FB7C2F9E294}"/>
+          </ac:spMkLst>
+        </pc:spChg>
+        <pc:spChg chg="mod">
+          <ac:chgData name="Benjamín de Jesús Cueva Niño de Guzmán" userId="56da303013910523" providerId="LiveId" clId="{532B7A48-8887-4F62-9537-0BA1FAE83637}" dt="2026-02-27T19:57:07.447" v="20" actId="962"/>
+          <ac:spMkLst>
+            <pc:docMk/>
+            <pc:sldMk cId="1330590418" sldId="271"/>
+            <ac:spMk id="3" creationId="{8DC1C730-CF27-EE49-4929-25151E2F6190}"/>
+          </ac:spMkLst>
+        </pc:spChg>
+        <pc:spChg chg="add mod ord">
+          <ac:chgData name="Benjamín de Jesús Cueva Niño de Guzmán" userId="56da303013910523" providerId="LiveId" clId="{532B7A48-8887-4F62-9537-0BA1FAE83637}" dt="2026-02-27T20:31:38.784" v="176" actId="167"/>
+          <ac:spMkLst>
+            <pc:docMk/>
+            <pc:sldMk cId="1330590418" sldId="271"/>
+            <ac:spMk id="5" creationId="{44C4B248-3952-EF29-6736-FF007574F1A6}"/>
+          </ac:spMkLst>
+        </pc:spChg>
+        <pc:spChg chg="mod">
+          <ac:chgData name="Benjamín de Jesús Cueva Niño de Guzmán" userId="56da303013910523" providerId="LiveId" clId="{532B7A48-8887-4F62-9537-0BA1FAE83637}" dt="2026-02-27T20:31:50.405" v="195" actId="1036"/>
+          <ac:spMkLst>
+            <pc:docMk/>
+            <pc:sldMk cId="1330590418" sldId="271"/>
+            <ac:spMk id="15" creationId="{6181BA67-E1F2-0033-0081-C78685C4EFFB}"/>
+          </ac:spMkLst>
+        </pc:spChg>
+        <pc:spChg chg="mod">
+          <ac:chgData name="Benjamín de Jesús Cueva Niño de Guzmán" userId="56da303013910523" providerId="LiveId" clId="{532B7A48-8887-4F62-9537-0BA1FAE83637}" dt="2026-02-27T20:14:22.949" v="152" actId="20577"/>
+          <ac:spMkLst>
+            <pc:docMk/>
+            <pc:sldMk cId="1330590418" sldId="271"/>
+            <ac:spMk id="19" creationId="{C0D9FAA0-08E8-BE91-7635-49B14F81758C}"/>
+          </ac:spMkLst>
+        </pc:spChg>
+        <pc:spChg chg="del">
+          <ac:chgData name="Benjamín de Jesús Cueva Niño de Guzmán" userId="56da303013910523" providerId="LiveId" clId="{532B7A48-8887-4F62-9537-0BA1FAE83637}" dt="2026-02-27T19:54:48.427" v="16" actId="478"/>
+          <ac:spMkLst>
+            <pc:docMk/>
+            <pc:sldMk cId="1330590418" sldId="271"/>
+            <ac:spMk id="20" creationId="{E2BAC0BA-6DEF-E8B2-0599-9DAE3B94E3B4}"/>
+          </ac:spMkLst>
+        </pc:spChg>
+        <pc:picChg chg="mod">
+          <ac:chgData name="Benjamín de Jesús Cueva Niño de Guzmán" userId="56da303013910523" providerId="LiveId" clId="{532B7A48-8887-4F62-9537-0BA1FAE83637}" dt="2026-02-27T19:54:21.101" v="1"/>
+          <ac:picMkLst>
+            <pc:docMk/>
+            <pc:sldMk cId="1330590418" sldId="271"/>
+            <ac:picMk id="4" creationId="{60DE8CCB-49A1-55D7-C9BB-F7CB1F5B3594}"/>
+          </ac:picMkLst>
+        </pc:picChg>
+        <pc:picChg chg="mod">
+          <ac:chgData name="Benjamín de Jesús Cueva Niño de Guzmán" userId="56da303013910523" providerId="LiveId" clId="{532B7A48-8887-4F62-9537-0BA1FAE83637}" dt="2026-02-27T19:56:28.438" v="17" actId="12788"/>
+          <ac:picMkLst>
+            <pc:docMk/>
+            <pc:sldMk cId="1330590418" sldId="271"/>
+            <ac:picMk id="8" creationId="{6A27773A-14F1-8F70-059F-80FE08044C7F}"/>
+          </ac:picMkLst>
+        </pc:picChg>
+        <pc:picChg chg="mod">
+          <ac:chgData name="Benjamín de Jesús Cueva Niño de Guzmán" userId="56da303013910523" providerId="LiveId" clId="{532B7A48-8887-4F62-9537-0BA1FAE83637}" dt="2026-02-27T20:31:50.405" v="195" actId="1036"/>
+          <ac:picMkLst>
+            <pc:docMk/>
+            <pc:sldMk cId="1330590418" sldId="271"/>
+            <ac:picMk id="16" creationId="{8AFE8DB8-BB3D-9C4F-317A-D420ABEEF7CD}"/>
+          </ac:picMkLst>
+        </pc:picChg>
+      </pc:sldChg>
+      <pc:sldChg chg="modSp mod">
+        <pc:chgData name="Benjamín de Jesús Cueva Niño de Guzmán" userId="56da303013910523" providerId="LiveId" clId="{532B7A48-8887-4F62-9537-0BA1FAE83637}" dt="2026-02-27T22:28:00.143" v="200" actId="255"/>
+        <pc:sldMkLst>
+          <pc:docMk/>
+          <pc:sldMk cId="186929205" sldId="272"/>
+        </pc:sldMkLst>
+        <pc:spChg chg="mod">
+          <ac:chgData name="Benjamín de Jesús Cueva Niño de Guzmán" userId="56da303013910523" providerId="LiveId" clId="{532B7A48-8887-4F62-9537-0BA1FAE83637}" dt="2026-02-27T22:18:15.006" v="198" actId="962"/>
+          <ac:spMkLst>
+            <pc:docMk/>
+            <pc:sldMk cId="186929205" sldId="272"/>
+            <ac:spMk id="10" creationId="{D44B2567-D1AD-5922-21FA-C8B8BF799204}"/>
+          </ac:spMkLst>
+        </pc:spChg>
+        <pc:graphicFrameChg chg="mod modGraphic">
+          <ac:chgData name="Benjamín de Jesús Cueva Niño de Guzmán" userId="56da303013910523" providerId="LiveId" clId="{532B7A48-8887-4F62-9537-0BA1FAE83637}" dt="2026-02-27T22:28:00.143" v="200" actId="255"/>
+          <ac:graphicFrameMkLst>
+            <pc:docMk/>
+            <pc:sldMk cId="186929205" sldId="272"/>
+            <ac:graphicFrameMk id="14" creationId="{727B0309-C2F5-4DEB-3AF8-D7FD142D7B92}"/>
+          </ac:graphicFrameMkLst>
+        </pc:graphicFrameChg>
+        <pc:picChg chg="mod">
+          <ac:chgData name="Benjamín de Jesús Cueva Niño de Guzmán" userId="56da303013910523" providerId="LiveId" clId="{532B7A48-8887-4F62-9537-0BA1FAE83637}" dt="2026-02-27T19:56:39.075" v="18" actId="12788"/>
+          <ac:picMkLst>
+            <pc:docMk/>
+            <pc:sldMk cId="186929205" sldId="272"/>
+            <ac:picMk id="18" creationId="{A31EE33C-C2BD-2E42-1AD7-EE358415BDE5}"/>
+          </ac:picMkLst>
+        </pc:picChg>
+      </pc:sldChg>
+    </pc:docChg>
+  </pc:docChgLst>
+</pc:chgInfo>
 </file>
 
 <file path=ppt/handoutMasters/handoutMaster1.xml><?xml version="1.0" encoding="utf-8"?>
@@ -209,7 +333,7 @@
           <a:p>
             <a:fld id="{03C7FEFC-EB52-44D6-B3F1-2A7BB7FA4226}" type="datetimeFigureOut">
               <a:rPr lang="es-PE" smtClean="0"/>
-              <a:t>2/02/2026</a:t>
+              <a:t>27/02/2026</a:t>
             </a:fld>
             <a:endParaRPr lang="es-PE" dirty="0"/>
           </a:p>
@@ -374,7 +498,7 @@
           <a:p>
             <a:fld id="{64955E78-CBAA-441B-9163-D9CD5E983BDA}" type="datetimeFigureOut">
               <a:rPr lang="en-US" smtClean="0"/>
-              <a:t>2/2/2026</a:t>
+              <a:t>2/27/2026</a:t>
             </a:fld>
             <a:endParaRPr lang="en-US" dirty="0"/>
           </a:p>
@@ -773,7 +897,7 @@
           <a:p>
             <a:fld id="{5C4C4E00-4716-4B48-9D97-535E4F94A274}" type="datetimeFigureOut">
               <a:rPr lang="es-PE" smtClean="0"/>
-              <a:t>2/02/2026</a:t>
+              <a:t>27/02/2026</a:t>
             </a:fld>
             <a:endParaRPr lang="es-PE" dirty="0"/>
           </a:p>
@@ -943,7 +1067,7 @@
           <a:p>
             <a:fld id="{5C4C4E00-4716-4B48-9D97-535E4F94A274}" type="datetimeFigureOut">
               <a:rPr lang="es-PE" smtClean="0"/>
-              <a:t>2/02/2026</a:t>
+              <a:t>27/02/2026</a:t>
             </a:fld>
             <a:endParaRPr lang="es-PE" dirty="0"/>
           </a:p>
@@ -1123,7 +1247,7 @@
           <a:p>
             <a:fld id="{5C4C4E00-4716-4B48-9D97-535E4F94A274}" type="datetimeFigureOut">
               <a:rPr lang="es-PE" smtClean="0"/>
-              <a:t>2/02/2026</a:t>
+              <a:t>27/02/2026</a:t>
             </a:fld>
             <a:endParaRPr lang="es-PE" dirty="0"/>
           </a:p>
@@ -1293,7 +1417,7 @@
           <a:p>
             <a:fld id="{5C4C4E00-4716-4B48-9D97-535E4F94A274}" type="datetimeFigureOut">
               <a:rPr lang="es-PE" smtClean="0"/>
-              <a:t>2/02/2026</a:t>
+              <a:t>27/02/2026</a:t>
             </a:fld>
             <a:endParaRPr lang="es-PE" dirty="0"/>
           </a:p>
@@ -1537,7 +1661,7 @@
           <a:p>
             <a:fld id="{5C4C4E00-4716-4B48-9D97-535E4F94A274}" type="datetimeFigureOut">
               <a:rPr lang="es-PE" smtClean="0"/>
-              <a:t>2/02/2026</a:t>
+              <a:t>27/02/2026</a:t>
             </a:fld>
             <a:endParaRPr lang="es-PE" dirty="0"/>
           </a:p>
@@ -1769,7 +1893,7 @@
           <a:p>
             <a:fld id="{5C4C4E00-4716-4B48-9D97-535E4F94A274}" type="datetimeFigureOut">
               <a:rPr lang="es-PE" smtClean="0"/>
-              <a:t>2/02/2026</a:t>
+              <a:t>27/02/2026</a:t>
             </a:fld>
             <a:endParaRPr lang="es-PE" dirty="0"/>
           </a:p>
@@ -2136,7 +2260,7 @@
           <a:p>
             <a:fld id="{5C4C4E00-4716-4B48-9D97-535E4F94A274}" type="datetimeFigureOut">
               <a:rPr lang="es-PE" smtClean="0"/>
-              <a:t>2/02/2026</a:t>
+              <a:t>27/02/2026</a:t>
             </a:fld>
             <a:endParaRPr lang="es-PE" dirty="0"/>
           </a:p>
@@ -2254,7 +2378,7 @@
           <a:p>
             <a:fld id="{5C4C4E00-4716-4B48-9D97-535E4F94A274}" type="datetimeFigureOut">
               <a:rPr lang="es-PE" smtClean="0"/>
-              <a:t>2/02/2026</a:t>
+              <a:t>27/02/2026</a:t>
             </a:fld>
             <a:endParaRPr lang="es-PE" dirty="0"/>
           </a:p>
@@ -2349,7 +2473,7 @@
           <a:p>
             <a:fld id="{5C4C4E00-4716-4B48-9D97-535E4F94A274}" type="datetimeFigureOut">
               <a:rPr lang="es-PE" smtClean="0"/>
-              <a:t>2/02/2026</a:t>
+              <a:t>27/02/2026</a:t>
             </a:fld>
             <a:endParaRPr lang="es-PE" dirty="0"/>
           </a:p>
@@ -2626,7 +2750,7 @@
           <a:p>
             <a:fld id="{5C4C4E00-4716-4B48-9D97-535E4F94A274}" type="datetimeFigureOut">
               <a:rPr lang="es-PE" smtClean="0"/>
-              <a:t>2/02/2026</a:t>
+              <a:t>27/02/2026</a:t>
             </a:fld>
             <a:endParaRPr lang="es-PE" dirty="0"/>
           </a:p>
@@ -2883,7 +3007,7 @@
           <a:p>
             <a:fld id="{5C4C4E00-4716-4B48-9D97-535E4F94A274}" type="datetimeFigureOut">
               <a:rPr lang="es-PE" smtClean="0"/>
-              <a:t>2/02/2026</a:t>
+              <a:t>27/02/2026</a:t>
             </a:fld>
             <a:endParaRPr lang="es-PE" dirty="0"/>
           </a:p>
@@ -3096,7 +3220,7 @@
           <a:p>
             <a:fld id="{5C4C4E00-4716-4B48-9D97-535E4F94A274}" type="datetimeFigureOut">
               <a:rPr lang="es-PE" smtClean="0"/>
-              <a:t>2/02/2026</a:t>
+              <a:t>27/02/2026</a:t>
             </a:fld>
             <a:endParaRPr lang="es-PE" dirty="0"/>
           </a:p>
@@ -3544,7 +3668,7 @@
         </p:blipFill>
         <p:spPr>
           <a:xfrm>
-            <a:off x="619904" y="2645558"/>
+            <a:off x="792012" y="2645558"/>
             <a:ext cx="5273976" cy="3936266"/>
           </a:xfrm>
           <a:prstGeom prst="rect">
@@ -3596,7 +3720,7 @@
       </p:pic>
       <p:sp>
         <p:nvSpPr>
-          <p:cNvPr id="2" name="CuadroTexto 1">
+          <p:cNvPr id="2" name="PH_NOMBRES_APELLIDOS">
             <a:extLst>
               <a:ext uri="{FF2B5EF4-FFF2-40B4-BE49-F238E27FC236}">
                 <a16:creationId xmlns:a16="http://schemas.microsoft.com/office/drawing/2014/main" id="{8999ECBF-332A-795D-7E69-2FB7C2F9E294}"/>
@@ -3826,7 +3950,7 @@
       </p:sp>
       <p:sp>
         <p:nvSpPr>
-          <p:cNvPr id="3" name="Rectángulo 2">
+          <p:cNvPr id="3" name="PH_CONDEDIDO_A">
             <a:extLst>
               <a:ext uri="{FF2B5EF4-FFF2-40B4-BE49-F238E27FC236}">
                 <a16:creationId xmlns:a16="http://schemas.microsoft.com/office/drawing/2014/main" id="{8DC1C730-CF27-EE49-4929-25151E2F6190}"/>
@@ -3895,20 +4019,22 @@
       </p:sp>
       <p:sp>
         <p:nvSpPr>
-          <p:cNvPr id="19" name="Rectangle 60">
+          <p:cNvPr id="19" name="PH_CONTENIDO_PRINCIPAL">
             <a:extLst>
               <a:ext uri="{FF2B5EF4-FFF2-40B4-BE49-F238E27FC236}">
                 <a16:creationId xmlns:a16="http://schemas.microsoft.com/office/drawing/2014/main" id="{C0D9FAA0-08E8-BE91-7635-49B14F81758C}"/>
               </a:ext>
             </a:extLst>
           </p:cNvPr>
-          <p:cNvSpPr/>
+          <p:cNvSpPr>
+            <a:spLocks/>
+          </p:cNvSpPr>
           <p:nvPr/>
         </p:nvSpPr>
         <p:spPr>
           <a:xfrm>
-            <a:off x="477169" y="3333945"/>
-            <a:ext cx="5903662" cy="2967105"/>
+            <a:off x="477169" y="3516498"/>
+            <a:ext cx="5903662" cy="1769715"/>
           </a:xfrm>
           <a:prstGeom prst="rect">
             <a:avLst/>
@@ -3918,7 +4044,7 @@
           </a:ln>
         </p:spPr>
         <p:txBody>
-          <a:bodyPr vert="horz" lIns="0" tIns="0" rIns="0" bIns="0" rtlCol="0" anchor="ctr">
+          <a:bodyPr vert="horz" wrap="square" lIns="0" tIns="0" rIns="0" bIns="0" rtlCol="0" anchor="t" anchorCtr="1">
             <a:noAutofit/>
           </a:bodyPr>
           <a:lstStyle/>
@@ -4104,57 +4230,6 @@
               </a:rPr>
               <a:t>Por tanto, se expide el presente Diplomado para que se le reconozca como tal.</a:t>
             </a:r>
-          </a:p>
-        </p:txBody>
-      </p:sp>
-      <p:sp>
-        <p:nvSpPr>
-          <p:cNvPr id="20" name="Rectángulo 19">
-            <a:extLst>
-              <a:ext uri="{FF2B5EF4-FFF2-40B4-BE49-F238E27FC236}">
-                <a16:creationId xmlns:a16="http://schemas.microsoft.com/office/drawing/2014/main" id="{E2BAC0BA-6DEF-E8B2-0599-9DAE3B94E3B4}"/>
-              </a:ext>
-            </a:extLst>
-          </p:cNvPr>
-          <p:cNvSpPr/>
-          <p:nvPr/>
-        </p:nvSpPr>
-        <p:spPr>
-          <a:xfrm>
-            <a:off x="1071040" y="3342633"/>
-            <a:ext cx="5167704" cy="184666"/>
-          </a:xfrm>
-          <a:prstGeom prst="rect">
-            <a:avLst/>
-          </a:prstGeom>
-        </p:spPr>
-        <p:txBody>
-          <a:bodyPr wrap="square">
-            <a:spAutoFit/>
-          </a:bodyPr>
-          <a:lstStyle/>
-          <a:p>
-            <a:pPr algn="ctr">
-              <a:spcBef>
-                <a:spcPts val="415"/>
-              </a:spcBef>
-              <a:spcAft>
-                <a:spcPts val="415"/>
-              </a:spcAft>
-            </a:pPr>
-            <a:r>
-              <a:rPr lang="es-PE" sz="600" b="1" dirty="0">
-                <a:latin typeface="Cambria Math" panose="02040503050406030204" pitchFamily="18" charset="0"/>
-                <a:ea typeface="Cambria Math" panose="02040503050406030204" pitchFamily="18" charset="0"/>
-                <a:cs typeface="Times New Roman" panose="02020603050405020304" pitchFamily="18" charset="0"/>
-              </a:rPr>
-              <a:t> </a:t>
-            </a:r>
-            <a:endParaRPr lang="en-US" sz="900" b="1" dirty="0">
-              <a:latin typeface="Cambria Math" panose="02040503050406030204" pitchFamily="18" charset="0"/>
-              <a:ea typeface="Cambria Math" panose="02040503050406030204" pitchFamily="18" charset="0"/>
-              <a:cs typeface="Times New Roman" panose="02020603050405020304" pitchFamily="18" charset="0"/>
-            </a:endParaRPr>
           </a:p>
         </p:txBody>
       </p:sp>
@@ -4208,7 +4283,7 @@
         </p:nvSpPr>
         <p:spPr>
           <a:xfrm>
-            <a:off x="3246807" y="7258027"/>
+            <a:off x="3246807" y="7782460"/>
             <a:ext cx="3176336" cy="303929"/>
           </a:xfrm>
           <a:prstGeom prst="rect">
@@ -4279,7 +4354,7 @@
         </p:blipFill>
         <p:spPr>
           <a:xfrm>
-            <a:off x="4975860" y="6371244"/>
+            <a:off x="4975860" y="6895677"/>
             <a:ext cx="830904" cy="830904"/>
           </a:xfrm>
           <a:prstGeom prst="rect">
@@ -4396,7 +4471,7 @@
         </p:blipFill>
         <p:spPr>
           <a:xfrm>
-            <a:off x="619904" y="2645558"/>
+            <a:off x="792012" y="2645558"/>
             <a:ext cx="5273976" cy="3936266"/>
           </a:xfrm>
           <a:prstGeom prst="rect">
@@ -4448,7 +4523,7 @@
       </p:pic>
       <p:sp>
         <p:nvSpPr>
-          <p:cNvPr id="10" name="CuadroTexto 9">
+          <p:cNvPr id="10" name="PH_TEMA">
             <a:extLst>
               <a:ext uri="{FF2B5EF4-FFF2-40B4-BE49-F238E27FC236}">
                 <a16:creationId xmlns:a16="http://schemas.microsoft.com/office/drawing/2014/main" id="{D44B2567-D1AD-5922-21FA-C8B8BF799204}"/>
@@ -5187,7 +5262,7 @@
       </p:graphicFrame>
       <p:graphicFrame>
         <p:nvGraphicFramePr>
-          <p:cNvPr id="14" name="Tabla 13">
+          <p:cNvPr id="14" name="PH_TABLA">
             <a:extLst>
               <a:ext uri="{FF2B5EF4-FFF2-40B4-BE49-F238E27FC236}">
                 <a16:creationId xmlns:a16="http://schemas.microsoft.com/office/drawing/2014/main" id="{727B0309-C2F5-4DEB-3AF8-D7FD142D7B92}"/>
@@ -5200,7 +5275,7 @@
           <p:nvPr>
             <p:extLst>
               <p:ext uri="{D42A27DB-BD31-4B8C-83A1-F6EECF244321}">
-                <p14:modId xmlns:p14="http://schemas.microsoft.com/office/powerpoint/2010/main" val="1728316434"/>
+                <p14:modId xmlns:p14="http://schemas.microsoft.com/office/powerpoint/2010/main" val="2048178501"/>
               </p:ext>
             </p:extLst>
           </p:nvPr>
@@ -5385,7 +5460,7 @@
                     <a:p>
                       <a:pPr algn="ctr"/>
                       <a:r>
-                        <a:rPr lang="es-ES" sz="1000" dirty="0"/>
+                        <a:rPr lang="es-ES" sz="900" dirty="0"/>
                         <a:t>{{MODULO_1}}</a:t>
                       </a:r>
                     </a:p>
@@ -5478,7 +5553,7 @@
                         <a:defRPr/>
                       </a:pPr>
                       <a:r>
-                        <a:rPr lang="es-ES" sz="1000" dirty="0"/>
+                        <a:rPr lang="es-ES" sz="900" dirty="0"/>
                         <a:t>{{MODULO_2}}</a:t>
                       </a:r>
                     </a:p>
@@ -5551,10 +5626,10 @@
                         <a:defRPr/>
                       </a:pPr>
                       <a:r>
-                        <a:rPr lang="es-ES" sz="1000" dirty="0"/>
+                        <a:rPr lang="es-ES" sz="900" dirty="0"/>
                         <a:t>{{MODULO_3}}</a:t>
                       </a:r>
-                      <a:endParaRPr lang="es-PE" sz="1000" b="0" i="0" kern="1200" dirty="0">
+                      <a:endParaRPr lang="es-PE" sz="900" b="0" i="0" kern="1200" dirty="0">
                         <a:solidFill>
                           <a:schemeClr val="dk1"/>
                         </a:solidFill>
@@ -5653,10 +5728,10 @@
                         <a:defRPr/>
                       </a:pPr>
                       <a:r>
-                        <a:rPr lang="es-ES" sz="1000" dirty="0"/>
+                        <a:rPr lang="es-ES" sz="900" dirty="0"/>
                         <a:t>{{MODULO_4}}</a:t>
                       </a:r>
-                      <a:endParaRPr lang="es-PE" sz="1000" b="0" i="0" kern="1200" dirty="0">
+                      <a:endParaRPr lang="es-PE" sz="900" b="0" i="0" kern="1200" dirty="0">
                         <a:solidFill>
                           <a:schemeClr val="dk1"/>
                         </a:solidFill>
@@ -5751,10 +5826,10 @@
                         <a:defRPr/>
                       </a:pPr>
                       <a:r>
-                        <a:rPr lang="es-ES" sz="1000" dirty="0"/>
+                        <a:rPr lang="es-ES" sz="900" dirty="0"/>
                         <a:t>{{MODULO_5}}</a:t>
                       </a:r>
-                      <a:endParaRPr lang="es-PE" sz="1000" b="0" i="0" kern="1200" dirty="0">
+                      <a:endParaRPr lang="es-PE" sz="900" b="0" i="0" kern="1200" dirty="0">
                         <a:solidFill>
                           <a:schemeClr val="dk1"/>
                         </a:solidFill>
@@ -5856,10 +5931,10 @@
                         <a:defRPr/>
                       </a:pPr>
                       <a:r>
-                        <a:rPr lang="es-PE" sz="1000" dirty="0"/>
+                        <a:rPr lang="es-PE" sz="900" dirty="0"/>
                         <a:t>{{MODULO_6}}</a:t>
                       </a:r>
-                      <a:endParaRPr lang="es-PE" sz="1000" b="0" i="0" kern="1200" dirty="0">
+                      <a:endParaRPr lang="es-PE" sz="900" b="0" i="0" kern="1200" dirty="0">
                         <a:solidFill>
                           <a:schemeClr val="dk1"/>
                         </a:solidFill>
@@ -5957,10 +6032,10 @@
                         <a:defRPr/>
                       </a:pPr>
                       <a:r>
-                        <a:rPr lang="es-ES" sz="1000" dirty="0"/>
+                        <a:rPr lang="es-ES" sz="900" dirty="0"/>
                         <a:t>{{MODULO_7}}</a:t>
                       </a:r>
-                      <a:endParaRPr lang="es-PE" sz="1000" b="0" i="0" kern="1200" dirty="0">
+                      <a:endParaRPr lang="es-PE" sz="900" b="0" i="0" kern="1200" dirty="0">
                         <a:solidFill>
                           <a:schemeClr val="dk1"/>
                         </a:solidFill>
@@ -6062,7 +6137,7 @@
                         <a:defRPr/>
                       </a:pPr>
                       <a:r>
-                        <a:rPr lang="es-ES" sz="1000" dirty="0"/>
+                        <a:rPr lang="es-ES" sz="900" dirty="0"/>
                         <a:t>{{MODULO_8}}</a:t>
                       </a:r>
                     </a:p>

--- a/app/templates/universidad_azul/plantilla_diplomado.pptx
+++ b/app/templates/universidad_azul/plantilla_diplomado.pptx
@@ -122,7 +122,7 @@
 <file path=ppt/revisionInfo.xml><?xml version="1.0" encoding="utf-8"?>
 <p1510:revInfo xmlns:a="http://schemas.openxmlformats.org/drawingml/2006/main" xmlns:r="http://schemas.openxmlformats.org/officeDocument/2006/relationships" xmlns:p1510="http://schemas.microsoft.com/office/powerpoint/2015/10/main">
   <p1510:revLst>
-    <p1510:client id="{4EA50A64-F2EE-41C9-82F9-A5599628D266}" v="17" dt="2026-02-27T22:18:25.897"/>
+    <p1510:client id="{4EA50A64-F2EE-41C9-82F9-A5599628D266}" v="18" dt="2026-03-04T23:10:30.017"/>
   </p1510:revLst>
 </p1510:revInfo>
 </file>
@@ -132,18 +132,18 @@
   <pc:docChgLst>
     <pc:chgData name="Benjamín de Jesús Cueva Niño de Guzmán" userId="56da303013910523" providerId="LiveId" clId="{532B7A48-8887-4F62-9537-0BA1FAE83637}"/>
     <pc:docChg chg="undo custSel modSld">
-      <pc:chgData name="Benjamín de Jesús Cueva Niño de Guzmán" userId="56da303013910523" providerId="LiveId" clId="{532B7A48-8887-4F62-9537-0BA1FAE83637}" dt="2026-02-27T22:28:00.143" v="200" actId="255"/>
+      <pc:chgData name="Benjamín de Jesús Cueva Niño de Guzmán" userId="56da303013910523" providerId="LiveId" clId="{532B7A48-8887-4F62-9537-0BA1FAE83637}" dt="2026-03-05T18:30:06.025" v="224" actId="12788"/>
       <pc:docMkLst>
         <pc:docMk/>
       </pc:docMkLst>
       <pc:sldChg chg="addSp delSp modSp mod">
-        <pc:chgData name="Benjamín de Jesús Cueva Niño de Guzmán" userId="56da303013910523" providerId="LiveId" clId="{532B7A48-8887-4F62-9537-0BA1FAE83637}" dt="2026-02-27T20:31:50.405" v="195" actId="1036"/>
+        <pc:chgData name="Benjamín de Jesús Cueva Niño de Guzmán" userId="56da303013910523" providerId="LiveId" clId="{532B7A48-8887-4F62-9537-0BA1FAE83637}" dt="2026-03-05T18:30:06.025" v="224" actId="12788"/>
         <pc:sldMkLst>
           <pc:docMk/>
           <pc:sldMk cId="1330590418" sldId="271"/>
         </pc:sldMkLst>
         <pc:spChg chg="mod">
-          <ac:chgData name="Benjamín de Jesús Cueva Niño de Guzmán" userId="56da303013910523" providerId="LiveId" clId="{532B7A48-8887-4F62-9537-0BA1FAE83637}" dt="2026-02-27T19:56:56.957" v="19" actId="962"/>
+          <ac:chgData name="Benjamín de Jesús Cueva Niño de Guzmán" userId="56da303013910523" providerId="LiveId" clId="{532B7A48-8887-4F62-9537-0BA1FAE83637}" dt="2026-03-04T23:08:56.562" v="210" actId="1035"/>
           <ac:spMkLst>
             <pc:docMk/>
             <pc:sldMk cId="1330590418" sldId="271"/>
@@ -151,23 +151,23 @@
           </ac:spMkLst>
         </pc:spChg>
         <pc:spChg chg="mod">
-          <ac:chgData name="Benjamín de Jesús Cueva Niño de Guzmán" userId="56da303013910523" providerId="LiveId" clId="{532B7A48-8887-4F62-9537-0BA1FAE83637}" dt="2026-02-27T19:57:07.447" v="20" actId="962"/>
+          <ac:chgData name="Benjamín de Jesús Cueva Niño de Guzmán" userId="56da303013910523" providerId="LiveId" clId="{532B7A48-8887-4F62-9537-0BA1FAE83637}" dt="2026-03-04T23:08:54.706" v="208" actId="1035"/>
           <ac:spMkLst>
             <pc:docMk/>
             <pc:sldMk cId="1330590418" sldId="271"/>
             <ac:spMk id="3" creationId="{8DC1C730-CF27-EE49-4929-25151E2F6190}"/>
           </ac:spMkLst>
         </pc:spChg>
-        <pc:spChg chg="add mod ord">
-          <ac:chgData name="Benjamín de Jesús Cueva Niño de Guzmán" userId="56da303013910523" providerId="LiveId" clId="{532B7A48-8887-4F62-9537-0BA1FAE83637}" dt="2026-02-27T20:31:38.784" v="176" actId="167"/>
+        <pc:spChg chg="add mod">
+          <ac:chgData name="Benjamín de Jesús Cueva Niño de Guzmán" userId="56da303013910523" providerId="LiveId" clId="{532B7A48-8887-4F62-9537-0BA1FAE83637}" dt="2026-03-04T23:10:30.017" v="221"/>
           <ac:spMkLst>
             <pc:docMk/>
             <pc:sldMk cId="1330590418" sldId="271"/>
-            <ac:spMk id="5" creationId="{44C4B248-3952-EF29-6736-FF007574F1A6}"/>
+            <ac:spMk id="5" creationId="{AFB6F93C-9F22-8EA7-7179-A5F6B3080552}"/>
           </ac:spMkLst>
         </pc:spChg>
-        <pc:spChg chg="mod">
-          <ac:chgData name="Benjamín de Jesús Cueva Niño de Guzmán" userId="56da303013910523" providerId="LiveId" clId="{532B7A48-8887-4F62-9537-0BA1FAE83637}" dt="2026-02-27T20:31:50.405" v="195" actId="1036"/>
+        <pc:spChg chg="del mod">
+          <ac:chgData name="Benjamín de Jesús Cueva Niño de Guzmán" userId="56da303013910523" providerId="LiveId" clId="{532B7A48-8887-4F62-9537-0BA1FAE83637}" dt="2026-03-04T23:10:27.344" v="220" actId="478"/>
           <ac:spMkLst>
             <pc:docMk/>
             <pc:sldMk cId="1330590418" sldId="271"/>
@@ -175,19 +175,11 @@
           </ac:spMkLst>
         </pc:spChg>
         <pc:spChg chg="mod">
-          <ac:chgData name="Benjamín de Jesús Cueva Niño de Guzmán" userId="56da303013910523" providerId="LiveId" clId="{532B7A48-8887-4F62-9537-0BA1FAE83637}" dt="2026-02-27T20:14:22.949" v="152" actId="20577"/>
+          <ac:chgData name="Benjamín de Jesús Cueva Niño de Guzmán" userId="56da303013910523" providerId="LiveId" clId="{532B7A48-8887-4F62-9537-0BA1FAE83637}" dt="2026-03-05T18:30:06.025" v="224" actId="12788"/>
           <ac:spMkLst>
             <pc:docMk/>
             <pc:sldMk cId="1330590418" sldId="271"/>
             <ac:spMk id="19" creationId="{C0D9FAA0-08E8-BE91-7635-49B14F81758C}"/>
-          </ac:spMkLst>
-        </pc:spChg>
-        <pc:spChg chg="del">
-          <ac:chgData name="Benjamín de Jesús Cueva Niño de Guzmán" userId="56da303013910523" providerId="LiveId" clId="{532B7A48-8887-4F62-9537-0BA1FAE83637}" dt="2026-02-27T19:54:48.427" v="16" actId="478"/>
-          <ac:spMkLst>
-            <pc:docMk/>
-            <pc:sldMk cId="1330590418" sldId="271"/>
-            <ac:spMk id="20" creationId="{E2BAC0BA-6DEF-E8B2-0599-9DAE3B94E3B4}"/>
           </ac:spMkLst>
         </pc:spChg>
         <pc:picChg chg="mod">
@@ -198,6 +190,14 @@
             <ac:picMk id="4" creationId="{60DE8CCB-49A1-55D7-C9BB-F7CB1F5B3594}"/>
           </ac:picMkLst>
         </pc:picChg>
+        <pc:picChg chg="add mod">
+          <ac:chgData name="Benjamín de Jesús Cueva Niño de Guzmán" userId="56da303013910523" providerId="LiveId" clId="{532B7A48-8887-4F62-9537-0BA1FAE83637}" dt="2026-03-04T23:10:30.017" v="221"/>
+          <ac:picMkLst>
+            <pc:docMk/>
+            <pc:sldMk cId="1330590418" sldId="271"/>
+            <ac:picMk id="7" creationId="{74C6FC0B-5FDE-2C97-66FC-E9A609429D1C}"/>
+          </ac:picMkLst>
+        </pc:picChg>
         <pc:picChg chg="mod">
           <ac:chgData name="Benjamín de Jesús Cueva Niño de Guzmán" userId="56da303013910523" providerId="LiveId" clId="{532B7A48-8887-4F62-9537-0BA1FAE83637}" dt="2026-02-27T19:56:28.438" v="17" actId="12788"/>
           <ac:picMkLst>
@@ -206,8 +206,8 @@
             <ac:picMk id="8" creationId="{6A27773A-14F1-8F70-059F-80FE08044C7F}"/>
           </ac:picMkLst>
         </pc:picChg>
-        <pc:picChg chg="mod">
-          <ac:chgData name="Benjamín de Jesús Cueva Niño de Guzmán" userId="56da303013910523" providerId="LiveId" clId="{532B7A48-8887-4F62-9537-0BA1FAE83637}" dt="2026-02-27T20:31:50.405" v="195" actId="1036"/>
+        <pc:picChg chg="del mod">
+          <ac:chgData name="Benjamín de Jesús Cueva Niño de Guzmán" userId="56da303013910523" providerId="LiveId" clId="{532B7A48-8887-4F62-9537-0BA1FAE83637}" dt="2026-03-04T23:10:27.344" v="220" actId="478"/>
           <ac:picMkLst>
             <pc:docMk/>
             <pc:sldMk cId="1330590418" sldId="271"/>
@@ -333,7 +333,7 @@
           <a:p>
             <a:fld id="{03C7FEFC-EB52-44D6-B3F1-2A7BB7FA4226}" type="datetimeFigureOut">
               <a:rPr lang="es-PE" smtClean="0"/>
-              <a:t>27/02/2026</a:t>
+              <a:t>5/03/2026</a:t>
             </a:fld>
             <a:endParaRPr lang="es-PE" dirty="0"/>
           </a:p>
@@ -498,7 +498,7 @@
           <a:p>
             <a:fld id="{64955E78-CBAA-441B-9163-D9CD5E983BDA}" type="datetimeFigureOut">
               <a:rPr lang="en-US" smtClean="0"/>
-              <a:t>2/27/2026</a:t>
+              <a:t>3/5/2026</a:t>
             </a:fld>
             <a:endParaRPr lang="en-US" dirty="0"/>
           </a:p>
@@ -897,7 +897,7 @@
           <a:p>
             <a:fld id="{5C4C4E00-4716-4B48-9D97-535E4F94A274}" type="datetimeFigureOut">
               <a:rPr lang="es-PE" smtClean="0"/>
-              <a:t>27/02/2026</a:t>
+              <a:t>5/03/2026</a:t>
             </a:fld>
             <a:endParaRPr lang="es-PE" dirty="0"/>
           </a:p>
@@ -1067,7 +1067,7 @@
           <a:p>
             <a:fld id="{5C4C4E00-4716-4B48-9D97-535E4F94A274}" type="datetimeFigureOut">
               <a:rPr lang="es-PE" smtClean="0"/>
-              <a:t>27/02/2026</a:t>
+              <a:t>5/03/2026</a:t>
             </a:fld>
             <a:endParaRPr lang="es-PE" dirty="0"/>
           </a:p>
@@ -1247,7 +1247,7 @@
           <a:p>
             <a:fld id="{5C4C4E00-4716-4B48-9D97-535E4F94A274}" type="datetimeFigureOut">
               <a:rPr lang="es-PE" smtClean="0"/>
-              <a:t>27/02/2026</a:t>
+              <a:t>5/03/2026</a:t>
             </a:fld>
             <a:endParaRPr lang="es-PE" dirty="0"/>
           </a:p>
@@ -1417,7 +1417,7 @@
           <a:p>
             <a:fld id="{5C4C4E00-4716-4B48-9D97-535E4F94A274}" type="datetimeFigureOut">
               <a:rPr lang="es-PE" smtClean="0"/>
-              <a:t>27/02/2026</a:t>
+              <a:t>5/03/2026</a:t>
             </a:fld>
             <a:endParaRPr lang="es-PE" dirty="0"/>
           </a:p>
@@ -1661,7 +1661,7 @@
           <a:p>
             <a:fld id="{5C4C4E00-4716-4B48-9D97-535E4F94A274}" type="datetimeFigureOut">
               <a:rPr lang="es-PE" smtClean="0"/>
-              <a:t>27/02/2026</a:t>
+              <a:t>5/03/2026</a:t>
             </a:fld>
             <a:endParaRPr lang="es-PE" dirty="0"/>
           </a:p>
@@ -1893,7 +1893,7 @@
           <a:p>
             <a:fld id="{5C4C4E00-4716-4B48-9D97-535E4F94A274}" type="datetimeFigureOut">
               <a:rPr lang="es-PE" smtClean="0"/>
-              <a:t>27/02/2026</a:t>
+              <a:t>5/03/2026</a:t>
             </a:fld>
             <a:endParaRPr lang="es-PE" dirty="0"/>
           </a:p>
@@ -2260,7 +2260,7 @@
           <a:p>
             <a:fld id="{5C4C4E00-4716-4B48-9D97-535E4F94A274}" type="datetimeFigureOut">
               <a:rPr lang="es-PE" smtClean="0"/>
-              <a:t>27/02/2026</a:t>
+              <a:t>5/03/2026</a:t>
             </a:fld>
             <a:endParaRPr lang="es-PE" dirty="0"/>
           </a:p>
@@ -2378,7 +2378,7 @@
           <a:p>
             <a:fld id="{5C4C4E00-4716-4B48-9D97-535E4F94A274}" type="datetimeFigureOut">
               <a:rPr lang="es-PE" smtClean="0"/>
-              <a:t>27/02/2026</a:t>
+              <a:t>5/03/2026</a:t>
             </a:fld>
             <a:endParaRPr lang="es-PE" dirty="0"/>
           </a:p>
@@ -2473,7 +2473,7 @@
           <a:p>
             <a:fld id="{5C4C4E00-4716-4B48-9D97-535E4F94A274}" type="datetimeFigureOut">
               <a:rPr lang="es-PE" smtClean="0"/>
-              <a:t>27/02/2026</a:t>
+              <a:t>5/03/2026</a:t>
             </a:fld>
             <a:endParaRPr lang="es-PE" dirty="0"/>
           </a:p>
@@ -2750,7 +2750,7 @@
           <a:p>
             <a:fld id="{5C4C4E00-4716-4B48-9D97-535E4F94A274}" type="datetimeFigureOut">
               <a:rPr lang="es-PE" smtClean="0"/>
-              <a:t>27/02/2026</a:t>
+              <a:t>5/03/2026</a:t>
             </a:fld>
             <a:endParaRPr lang="es-PE" dirty="0"/>
           </a:p>
@@ -3007,7 +3007,7 @@
           <a:p>
             <a:fld id="{5C4C4E00-4716-4B48-9D97-535E4F94A274}" type="datetimeFigureOut">
               <a:rPr lang="es-PE" smtClean="0"/>
-              <a:t>27/02/2026</a:t>
+              <a:t>5/03/2026</a:t>
             </a:fld>
             <a:endParaRPr lang="es-PE" dirty="0"/>
           </a:p>
@@ -3220,7 +3220,7 @@
           <a:p>
             <a:fld id="{5C4C4E00-4716-4B48-9D97-535E4F94A274}" type="datetimeFigureOut">
               <a:rPr lang="es-PE" smtClean="0"/>
-              <a:t>27/02/2026</a:t>
+              <a:t>5/03/2026</a:t>
             </a:fld>
             <a:endParaRPr lang="es-PE" dirty="0"/>
           </a:p>
@@ -3732,7 +3732,7 @@
         </p:nvSpPr>
         <p:spPr>
           <a:xfrm>
-            <a:off x="474329" y="2547371"/>
+            <a:off x="474329" y="2493583"/>
             <a:ext cx="5909343" cy="954107"/>
           </a:xfrm>
           <a:prstGeom prst="rect">
@@ -3962,7 +3962,7 @@
         </p:nvSpPr>
         <p:spPr>
           <a:xfrm>
-            <a:off x="2809279" y="2287819"/>
+            <a:off x="2809279" y="2247478"/>
             <a:ext cx="1239442" cy="306109"/>
           </a:xfrm>
           <a:prstGeom prst="rect">
@@ -4033,8 +4033,8 @@
         </p:nvSpPr>
         <p:spPr>
           <a:xfrm>
-            <a:off x="477169" y="3516498"/>
-            <a:ext cx="5903662" cy="1769715"/>
+            <a:off x="419400" y="3408922"/>
+            <a:ext cx="6019200" cy="1769715"/>
           </a:xfrm>
           <a:prstGeom prst="rect">
             <a:avLst/>
@@ -4269,99 +4269,6 @@
           </a:prstGeom>
         </p:spPr>
       </p:pic>
-      <p:sp>
-        <p:nvSpPr>
-          <p:cNvPr id="15" name="Rectángulo 14">
-            <a:extLst>
-              <a:ext uri="{FF2B5EF4-FFF2-40B4-BE49-F238E27FC236}">
-                <a16:creationId xmlns:a16="http://schemas.microsoft.com/office/drawing/2014/main" id="{6181BA67-E1F2-0033-0081-C78685C4EFFB}"/>
-              </a:ext>
-            </a:extLst>
-          </p:cNvPr>
-          <p:cNvSpPr/>
-          <p:nvPr/>
-        </p:nvSpPr>
-        <p:spPr>
-          <a:xfrm>
-            <a:off x="3246807" y="7782460"/>
-            <a:ext cx="3176336" cy="303929"/>
-          </a:xfrm>
-          <a:prstGeom prst="rect">
-            <a:avLst/>
-          </a:prstGeom>
-        </p:spPr>
-        <p:txBody>
-          <a:bodyPr wrap="square">
-            <a:spAutoFit/>
-          </a:bodyPr>
-          <a:lstStyle/>
-          <a:p>
-            <a:pPr lvl="0" algn="r">
-              <a:lnSpc>
-                <a:spcPct val="115000"/>
-              </a:lnSpc>
-              <a:spcBef>
-                <a:spcPts val="59"/>
-              </a:spcBef>
-            </a:pPr>
-            <a:r>
-              <a:rPr lang="es-PE" sz="1300" dirty="0">
-                <a:solidFill>
-                  <a:prstClr val="black"/>
-                </a:solidFill>
-                <a:latin typeface="Times New Roman" panose="02020603050405020304" pitchFamily="18" charset="0"/>
-                <a:ea typeface="Cambria Math" panose="02040503050406030204" pitchFamily="18" charset="0"/>
-                <a:cs typeface="Times New Roman" panose="02020603050405020304" pitchFamily="18" charset="0"/>
-              </a:rPr>
-              <a:t>Trujillo, {{FECHA_EMISION_LARGA}}</a:t>
-            </a:r>
-            <a:endParaRPr lang="en-US" sz="1300" dirty="0">
-              <a:solidFill>
-                <a:prstClr val="black"/>
-              </a:solidFill>
-              <a:latin typeface="Times New Roman" panose="02020603050405020304" pitchFamily="18" charset="0"/>
-              <a:ea typeface="Cambria Math" panose="02040503050406030204" pitchFamily="18" charset="0"/>
-              <a:cs typeface="Times New Roman" panose="02020603050405020304" pitchFamily="18" charset="0"/>
-            </a:endParaRPr>
-          </a:p>
-        </p:txBody>
-      </p:sp>
-      <p:pic>
-        <p:nvPicPr>
-          <p:cNvPr id="16" name="Imagen 15">
-            <a:extLst>
-              <a:ext uri="{FF2B5EF4-FFF2-40B4-BE49-F238E27FC236}">
-                <a16:creationId xmlns:a16="http://schemas.microsoft.com/office/drawing/2014/main" id="{8AFE8DB8-BB3D-9C4F-317A-D420ABEEF7CD}"/>
-              </a:ext>
-            </a:extLst>
-          </p:cNvPr>
-          <p:cNvPicPr>
-            <a:picLocks noChangeAspect="1"/>
-          </p:cNvPicPr>
-          <p:nvPr/>
-        </p:nvPicPr>
-        <p:blipFill>
-          <a:blip r:embed="rId6" cstate="print">
-            <a:extLst>
-              <a:ext uri="{28A0092B-C50C-407E-A947-70E740481C1C}">
-                <a14:useLocalDpi xmlns:a14="http://schemas.microsoft.com/office/drawing/2010/main" val="0"/>
-              </a:ext>
-            </a:extLst>
-          </a:blip>
-          <a:stretch>
-            <a:fillRect/>
-          </a:stretch>
-        </p:blipFill>
-        <p:spPr>
-          <a:xfrm>
-            <a:off x="4975860" y="6895677"/>
-            <a:ext cx="830904" cy="830904"/>
-          </a:xfrm>
-          <a:prstGeom prst="rect">
-            <a:avLst/>
-          </a:prstGeom>
-        </p:spPr>
-      </p:pic>
       <p:pic>
         <p:nvPicPr>
           <p:cNvPr id="4" name="Imagen 3" descr="Imagen en blanco y negro&#10;&#10;Descripción generada automáticamente con confianza baja">
@@ -4377,7 +4284,7 @@
           <p:nvPr/>
         </p:nvPicPr>
         <p:blipFill>
-          <a:blip r:embed="rId7">
+          <a:blip r:embed="rId6">
             <a:extLst>
               <a:ext uri="{28A0092B-C50C-407E-A947-70E740481C1C}">
                 <a14:useLocalDpi xmlns:a14="http://schemas.microsoft.com/office/drawing/2010/main" val="0"/>
@@ -4392,6 +4299,204 @@
           <a:xfrm>
             <a:off x="1727435" y="7803847"/>
             <a:ext cx="2813850" cy="1216800"/>
+          </a:xfrm>
+          <a:prstGeom prst="rect">
+            <a:avLst/>
+          </a:prstGeom>
+        </p:spPr>
+      </p:pic>
+      <p:sp>
+        <p:nvSpPr>
+          <p:cNvPr id="5" name="Rectángulo 4">
+            <a:extLst>
+              <a:ext uri="{FF2B5EF4-FFF2-40B4-BE49-F238E27FC236}">
+                <a16:creationId xmlns:a16="http://schemas.microsoft.com/office/drawing/2014/main" id="{AFB6F93C-9F22-8EA7-7179-A5F6B3080552}"/>
+              </a:ext>
+            </a:extLst>
+          </p:cNvPr>
+          <p:cNvSpPr/>
+          <p:nvPr/>
+        </p:nvSpPr>
+        <p:spPr>
+          <a:xfrm>
+            <a:off x="3339591" y="7789439"/>
+            <a:ext cx="3176336" cy="303929"/>
+          </a:xfrm>
+          <a:prstGeom prst="rect">
+            <a:avLst/>
+          </a:prstGeom>
+        </p:spPr>
+        <p:txBody>
+          <a:bodyPr wrap="square">
+            <a:spAutoFit/>
+          </a:bodyPr>
+          <a:lstStyle>
+            <a:defPPr>
+              <a:defRPr lang="en-US"/>
+            </a:defPPr>
+            <a:lvl1pPr marL="0" algn="l" defTabSz="457200" rtl="0" eaLnBrk="1" latinLnBrk="0" hangingPunct="1">
+              <a:defRPr sz="1800" kern="1200">
+                <a:solidFill>
+                  <a:schemeClr val="tx1"/>
+                </a:solidFill>
+                <a:latin typeface="+mn-lt"/>
+                <a:ea typeface="+mn-ea"/>
+                <a:cs typeface="+mn-cs"/>
+              </a:defRPr>
+            </a:lvl1pPr>
+            <a:lvl2pPr marL="457200" algn="l" defTabSz="457200" rtl="0" eaLnBrk="1" latinLnBrk="0" hangingPunct="1">
+              <a:defRPr sz="1800" kern="1200">
+                <a:solidFill>
+                  <a:schemeClr val="tx1"/>
+                </a:solidFill>
+                <a:latin typeface="+mn-lt"/>
+                <a:ea typeface="+mn-ea"/>
+                <a:cs typeface="+mn-cs"/>
+              </a:defRPr>
+            </a:lvl2pPr>
+            <a:lvl3pPr marL="914400" algn="l" defTabSz="457200" rtl="0" eaLnBrk="1" latinLnBrk="0" hangingPunct="1">
+              <a:defRPr sz="1800" kern="1200">
+                <a:solidFill>
+                  <a:schemeClr val="tx1"/>
+                </a:solidFill>
+                <a:latin typeface="+mn-lt"/>
+                <a:ea typeface="+mn-ea"/>
+                <a:cs typeface="+mn-cs"/>
+              </a:defRPr>
+            </a:lvl3pPr>
+            <a:lvl4pPr marL="1371600" algn="l" defTabSz="457200" rtl="0" eaLnBrk="1" latinLnBrk="0" hangingPunct="1">
+              <a:defRPr sz="1800" kern="1200">
+                <a:solidFill>
+                  <a:schemeClr val="tx1"/>
+                </a:solidFill>
+                <a:latin typeface="+mn-lt"/>
+                <a:ea typeface="+mn-ea"/>
+                <a:cs typeface="+mn-cs"/>
+              </a:defRPr>
+            </a:lvl4pPr>
+            <a:lvl5pPr marL="1828800" algn="l" defTabSz="457200" rtl="0" eaLnBrk="1" latinLnBrk="0" hangingPunct="1">
+              <a:defRPr sz="1800" kern="1200">
+                <a:solidFill>
+                  <a:schemeClr val="tx1"/>
+                </a:solidFill>
+                <a:latin typeface="+mn-lt"/>
+                <a:ea typeface="+mn-ea"/>
+                <a:cs typeface="+mn-cs"/>
+              </a:defRPr>
+            </a:lvl5pPr>
+            <a:lvl6pPr marL="2286000" algn="l" defTabSz="457200" rtl="0" eaLnBrk="1" latinLnBrk="0" hangingPunct="1">
+              <a:defRPr sz="1800" kern="1200">
+                <a:solidFill>
+                  <a:schemeClr val="tx1"/>
+                </a:solidFill>
+                <a:latin typeface="+mn-lt"/>
+                <a:ea typeface="+mn-ea"/>
+                <a:cs typeface="+mn-cs"/>
+              </a:defRPr>
+            </a:lvl6pPr>
+            <a:lvl7pPr marL="2743200" algn="l" defTabSz="457200" rtl="0" eaLnBrk="1" latinLnBrk="0" hangingPunct="1">
+              <a:defRPr sz="1800" kern="1200">
+                <a:solidFill>
+                  <a:schemeClr val="tx1"/>
+                </a:solidFill>
+                <a:latin typeface="+mn-lt"/>
+                <a:ea typeface="+mn-ea"/>
+                <a:cs typeface="+mn-cs"/>
+              </a:defRPr>
+            </a:lvl7pPr>
+            <a:lvl8pPr marL="3200400" algn="l" defTabSz="457200" rtl="0" eaLnBrk="1" latinLnBrk="0" hangingPunct="1">
+              <a:defRPr sz="1800" kern="1200">
+                <a:solidFill>
+                  <a:schemeClr val="tx1"/>
+                </a:solidFill>
+                <a:latin typeface="+mn-lt"/>
+                <a:ea typeface="+mn-ea"/>
+                <a:cs typeface="+mn-cs"/>
+              </a:defRPr>
+            </a:lvl8pPr>
+            <a:lvl9pPr marL="3657600" algn="l" defTabSz="457200" rtl="0" eaLnBrk="1" latinLnBrk="0" hangingPunct="1">
+              <a:defRPr sz="1800" kern="1200">
+                <a:solidFill>
+                  <a:schemeClr val="tx1"/>
+                </a:solidFill>
+                <a:latin typeface="+mn-lt"/>
+                <a:ea typeface="+mn-ea"/>
+                <a:cs typeface="+mn-cs"/>
+              </a:defRPr>
+            </a:lvl9pPr>
+          </a:lstStyle>
+          <a:p>
+            <a:pPr lvl="0" algn="r">
+              <a:lnSpc>
+                <a:spcPct val="115000"/>
+              </a:lnSpc>
+              <a:spcBef>
+                <a:spcPts val="59"/>
+              </a:spcBef>
+            </a:pPr>
+            <a:r>
+              <a:rPr lang="es-PE" sz="1300" dirty="0">
+                <a:solidFill>
+                  <a:prstClr val="black"/>
+                </a:solidFill>
+                <a:latin typeface="Times New Roman" panose="02020603050405020304" pitchFamily="18" charset="0"/>
+                <a:ea typeface="Cambria Math" panose="02040503050406030204" pitchFamily="18" charset="0"/>
+                <a:cs typeface="Times New Roman" panose="02020603050405020304" pitchFamily="18" charset="0"/>
+              </a:rPr>
+              <a:t>Trujillo, </a:t>
+            </a:r>
+            <a:r>
+              <a:rPr lang="es-ES" sz="1300" dirty="0">
+                <a:solidFill>
+                  <a:srgbClr val="000000"/>
+                </a:solidFill>
+                <a:latin typeface="Times New Roman" panose="02020603050405020304" pitchFamily="18" charset="0"/>
+                <a:ea typeface="Cambria Math" panose="02040503050406030204" pitchFamily="18" charset="0"/>
+                <a:cs typeface="Times New Roman" panose="02020603050405020304" pitchFamily="18" charset="0"/>
+              </a:rPr>
+              <a:t>{{FECHA_EMISION_LARGA}}</a:t>
+            </a:r>
+            <a:endParaRPr lang="en-US" sz="1300" dirty="0">
+              <a:solidFill>
+                <a:prstClr val="black"/>
+              </a:solidFill>
+              <a:latin typeface="Times New Roman" panose="02020603050405020304" pitchFamily="18" charset="0"/>
+              <a:ea typeface="Cambria Math" panose="02040503050406030204" pitchFamily="18" charset="0"/>
+              <a:cs typeface="Times New Roman" panose="02020603050405020304" pitchFamily="18" charset="0"/>
+            </a:endParaRPr>
+          </a:p>
+        </p:txBody>
+      </p:sp>
+      <p:pic>
+        <p:nvPicPr>
+          <p:cNvPr id="7" name="Imagen 6">
+            <a:extLst>
+              <a:ext uri="{FF2B5EF4-FFF2-40B4-BE49-F238E27FC236}">
+                <a16:creationId xmlns:a16="http://schemas.microsoft.com/office/drawing/2014/main" id="{74C6FC0B-5FDE-2C97-66FC-E9A609429D1C}"/>
+              </a:ext>
+            </a:extLst>
+          </p:cNvPr>
+          <p:cNvPicPr>
+            <a:picLocks noChangeAspect="1"/>
+          </p:cNvPicPr>
+          <p:nvPr/>
+        </p:nvPicPr>
+        <p:blipFill>
+          <a:blip r:embed="rId7" cstate="print">
+            <a:extLst>
+              <a:ext uri="{28A0092B-C50C-407E-A947-70E740481C1C}">
+                <a14:useLocalDpi xmlns:a14="http://schemas.microsoft.com/office/drawing/2010/main" val="0"/>
+              </a:ext>
+            </a:extLst>
+          </a:blip>
+          <a:stretch>
+            <a:fillRect/>
+          </a:stretch>
+        </p:blipFill>
+        <p:spPr>
+          <a:xfrm>
+            <a:off x="5140422" y="6958535"/>
+            <a:ext cx="830904" cy="830904"/>
           </a:xfrm>
           <a:prstGeom prst="rect">
             <a:avLst/>
